--- a/ADG/_실측판/03장/3장_DataGuard를위한OracleNet구성.pptx
+++ b/ADG/_실측판/03장/3장_DataGuard를위한OracleNet구성.pptx
@@ -8486,7 +8486,16 @@
                 </a:solidFill>
                 <a:latin typeface="맑은 고딕"/>
               </a:rPr>
-              <a:t>•  이름은 달라도 **내용(SYS 비밀번호)은 같아야 한다**</a:t>
+              <a:t>•  이름은 달라도 </a:t>
+            </a:r>
+            <a:r>
+              <a:rPr sz="1600" b="1">
+                <a:solidFill>
+                  <a:srgbClr val="222222"/>
+                </a:solidFill>
+                <a:latin typeface="맑은 고딕"/>
+              </a:rPr>
+              <a:t>내용(SYS 비밀번호)은 같아야 한다</a:t>
             </a:r>
           </a:p>
           <a:p>
